--- a/radar-anatel-inmetro/docs/deck-certificadoras.pptx
+++ b/radar-anatel-inmetro/docs/deck-certificadoras.pptx
@@ -1920,7 +1920,7 @@
                 <a:ea typeface="Arial" pitchFamily="34" charset="-122"/>
                 <a:cs typeface="Arial" pitchFamily="34" charset="-120"/>
               </a:rPr>
-              <a:t>A máquina de leads</a:t>
+              <a:t>Leads qualificados para</a:t>
             </a:r>
             <a:endParaRPr lang="en-US" sz="4400" dirty="0"/>
           </a:p>
@@ -1940,7 +1940,7 @@
                 <a:ea typeface="Arial" pitchFamily="34" charset="-122"/>
                 <a:cs typeface="Arial" pitchFamily="34" charset="-120"/>
               </a:rPr>
-              <a:t>para certificadoras</a:t>
+              <a:t>quem vende homologação</a:t>
             </a:r>
             <a:endParaRPr lang="en-US" sz="4400" dirty="0"/>
           </a:p>
@@ -1982,7 +1982,7 @@
                 <a:ea typeface="Arial" pitchFamily="34" charset="-122"/>
                 <a:cs typeface="Arial" pitchFamily="34" charset="-120"/>
               </a:rPr>
-              <a:t>A Resolução ANATEL 780/2025 criou milhares de vendedores irregulares no Mercado Livre.</a:t>
+              <a:t>A Res. ANATEL 780/2025 criou um estoque de marcas que precisam homologar — e ainda não sabem.</a:t>
             </a:r>
             <a:endParaRPr lang="en-US" sz="1600" dirty="0"/>
           </a:p>
@@ -2002,7 +2002,7 @@
                 <a:ea typeface="Arial" pitchFamily="34" charset="-122"/>
                 <a:cs typeface="Arial" pitchFamily="34" charset="-120"/>
               </a:rPr>
-              <a:t>O Radar Conformidade encontra cada um deles — e entrega o lead com a sua marca.</a:t>
+              <a:t>O Radar Conformidade encontra, qualifica e entrega o lead com a sua marca.</a:t>
             </a:r>
             <a:endParaRPr lang="en-US" sz="1600" dirty="0"/>
           </a:p>
@@ -2041,7 +2041,7 @@
                 <a:ea typeface="Arial" pitchFamily="34" charset="-122"/>
                 <a:cs typeface="Arial" pitchFamily="34" charset="-120"/>
               </a:rPr>
-              <a:t>Proposta de licenciamento white-label · 2026</a:t>
+              <a:t>Proposta de licenciamento white-label · consultorias e certificadoras · 2026</a:t>
             </a:r>
             <a:endParaRPr lang="en-US" sz="1200" dirty="0"/>
           </a:p>
@@ -3873,7 +3873,7 @@
                 <a:ea typeface="Arial" pitchFamily="34" charset="-122"/>
                 <a:cs typeface="Arial" pitchFamily="34" charset="-120"/>
               </a:rPr>
-              <a:t>O lead não sabe que tem o problema</a:t>
+              <a:t>Os leads quentes já sabem — e têm pressa</a:t>
             </a:r>
             <a:endParaRPr lang="en-US" sz="1800" dirty="0"/>
           </a:p>
@@ -3915,7 +3915,7 @@
                 <a:ea typeface="Arial" pitchFamily="34" charset="-122"/>
                 <a:cs typeface="Arial" pitchFamily="34" charset="-120"/>
               </a:rPr>
-              <a:t>Cada conversa começa com evangelização: explicar a 780/2025, o risco, a multa — antes de falar do serviço.</a:t>
+              <a:t>Quem teve anúncio removido recebeu o aviso do próprio ML e está procurando ajuda AGORA. Quem chega primeiro leva o contrato.</a:t>
             </a:r>
             <a:endParaRPr lang="en-US" sz="1350" dirty="0"/>
           </a:p>
@@ -4003,7 +4003,7 @@
                 <a:ea typeface="Arial" pitchFamily="34" charset="-122"/>
                 <a:cs typeface="Arial" pitchFamily="34" charset="-120"/>
               </a:rPr>
-              <a:t>Identificar quem precisa é trabalho manual</a:t>
+              <a:t>Os próximos ainda não sabem</a:t>
             </a:r>
             <a:endParaRPr lang="en-US" sz="1800" dirty="0"/>
           </a:p>
@@ -4045,7 +4045,7 @@
                 <a:ea typeface="Arial" pitchFamily="34" charset="-122"/>
                 <a:cs typeface="Arial" pitchFamily="34" charset="-120"/>
               </a:rPr>
-              <a:t>Descobrir quais lojas vendem produto sem homologação exige analisar catálogos anúncio por anúncio.</a:t>
+              <a:t>Marcas com anúncio irregular no ar são a fila da próxima remoção — mas encontrá-las exige analisar catálogos anúncio por anúncio.</a:t>
             </a:r>
             <a:endParaRPr lang="en-US" sz="1350" dirty="0"/>
           </a:p>
@@ -4133,7 +4133,7 @@
                 <a:ea typeface="Arial" pitchFamily="34" charset="-122"/>
                 <a:cs typeface="Arial" pitchFamily="34" charset="-120"/>
               </a:rPr>
-              <a:t>Lista fria converte mal</a:t>
+              <a:t>Nem todo irregular é cliente</a:t>
             </a:r>
             <a:endParaRPr lang="en-US" sz="1800" dirty="0"/>
           </a:p>
@@ -4175,7 +4175,7 @@
                 <a:ea typeface="Arial" pitchFamily="34" charset="-122"/>
                 <a:cs typeface="Arial" pitchFamily="34" charset="-120"/>
               </a:rPr>
-              <a:t>Sem a dor quantificada, a abordagem vira spam: "você conhece a norma?" não abre porta de dono de loja.</a:t>
+              <a:t>Revendedor de produto genérico troca de fornecedor, não certifica. Sem filtrar marca própria/importador, a lista vira spam.</a:t>
             </a:r>
             <a:endParaRPr lang="en-US" sz="1350" dirty="0"/>
           </a:p>
@@ -5423,7 +5423,7 @@
                 <a:ea typeface="Arial" pitchFamily="34" charset="-122"/>
                 <a:cs typeface="Arial" pitchFamily="34" charset="-120"/>
               </a:rPr>
-              <a:t>"Faturamento mensal em risco: R$ 28.294" — calculado com preço × vendas dos anúncios críticos da própria loja.</a:t>
+              <a:t>"Faturamento mensal em risco: R$ 17–39 mil" — faixa estimada com preço × vendas dos anúncios críticos da própria loja, com método e limites declarados.</a:t>
             </a:r>
             <a:endParaRPr lang="en-US" sz="1250" dirty="0"/>
           </a:p>
@@ -5941,7 +5941,7 @@
                 <a:ea typeface="Arial" pitchFamily="34" charset="-122"/>
                 <a:cs typeface="Arial" pitchFamily="34" charset="-120"/>
               </a:rPr>
-              <a:t>Ordenado por oportunidade</a:t>
+              <a:t>Leads qualificados por perfil</a:t>
             </a:r>
             <a:endParaRPr lang="en-US" sz="1450" dirty="0"/>
           </a:p>
@@ -5983,7 +5983,7 @@
                 <a:ea typeface="Arial" pitchFamily="34" charset="-122"/>
                 <a:cs typeface="Arial" pitchFamily="34" charset="-120"/>
               </a:rPr>
-              <a:t>críticos × faturamento em risco</a:t>
+              <a:t>marca identificável × revendedor de genérico — só o primeiro certifica</a:t>
             </a:r>
             <a:endParaRPr lang="en-US" sz="1150" dirty="0"/>
           </a:p>
@@ -6432,7 +6432,7 @@
                 <a:ea typeface="Arial" pitchFamily="34" charset="-122"/>
                 <a:cs typeface="Arial" pitchFamily="34" charset="-120"/>
               </a:rPr>
-              <a:t>“R$ 28.294/mês do faturamento da sua loja está em risco de remoção — </a:t>
+              <a:t>“Entre R$ 17 e 39 mil por mês do faturamento da sua loja está em risco de remoção — </a:t>
             </a:r>
             <a:pPr indent="0" marL="0">
               <a:lnSpc>
